--- a/diapositivas/Presentacion_Redes_Complejas_RedUCuenca.pptx
+++ b/diapositivas/Presentacion_Redes_Complejas_RedUCuenca.pptx
@@ -20836,7 +20836,7 @@
                 <a:ea typeface="Cambria" pitchFamily="34" charset="-122"/>
                 <a:cs typeface="Cambria" pitchFamily="34" charset="-120"/>
               </a:rPr>
-              <a:t>Robusta al azar, frágil al ataque: 42 nodos contra 4</a:t>
+              <a:t>Robusta al azar, frágil al ataque: 43 nodos contra 4</a:t>
             </a:r>
             <a:endParaRPr lang="en-US" sz="3000" dirty="0"/>
           </a:p>
@@ -21290,7 +21290,7 @@
                           <a:ea typeface="Calibri" pitchFamily="34" charset="-122"/>
                           <a:cs typeface="Calibri" pitchFamily="34" charset="-120"/>
                         </a:rPr>
-                        <a:t>0,237</a:t>
+                        <a:t>0,243</a:t>
                       </a:r>
                       <a:endParaRPr lang="en-US" sz="1100" dirty="0">
                         <a:latin typeface="Calibri" charset="0"/>
@@ -21355,7 +21355,7 @@
                           <a:ea typeface="Calibri" pitchFamily="34" charset="-122"/>
                           <a:cs typeface="Calibri" pitchFamily="34" charset="-120"/>
                         </a:rPr>
-                        <a:t>42</a:t>
+                        <a:t>43</a:t>
                       </a:r>
                       <a:endParaRPr lang="en-US" sz="1100" dirty="0">
                         <a:latin typeface="Calibri" charset="0"/>
@@ -21682,7 +21682,7 @@
                           <a:ea typeface="Calibri" pitchFamily="34" charset="-122"/>
                           <a:cs typeface="Calibri" pitchFamily="34" charset="-120"/>
                         </a:rPr>
-                        <a:t>0,381</a:t>
+                        <a:t>0,373</a:t>
                       </a:r>
                       <a:endParaRPr lang="en-US" sz="1100" dirty="0">
                         <a:latin typeface="Calibri" charset="0"/>
@@ -21944,7 +21944,7 @@
                           <a:ea typeface="Calibri" pitchFamily="34" charset="-122"/>
                           <a:cs typeface="Calibri" pitchFamily="34" charset="-120"/>
                         </a:rPr>
-                        <a:t>0,212</a:t>
+                        <a:t>0,198</a:t>
                       </a:r>
                       <a:endParaRPr lang="en-US" sz="1100" dirty="0">
                         <a:latin typeface="Calibri" charset="0"/>
@@ -22206,7 +22206,7 @@
                           <a:ea typeface="Calibri" pitchFamily="34" charset="-122"/>
                           <a:cs typeface="Calibri" pitchFamily="34" charset="-120"/>
                         </a:rPr>
-                        <a:t>0,053</a:t>
+                        <a:t>0,051</a:t>
                       </a:r>
                       <a:endParaRPr lang="en-US" sz="1100" dirty="0">
                         <a:latin typeface="Calibri" charset="0"/>
@@ -22388,7 +22388,7 @@
                 <a:ea typeface="Calibri" pitchFamily="34" charset="-122"/>
                 <a:cs typeface="Calibri" pitchFamily="34" charset="-120"/>
               </a:rPr>
-              <a:t>Un plan de RESPUESTA A INCIDENTES DE SEGURIDAD no puede asumir eso. Un atacante colapsa la red con 4 bajas dirigidas en vez de 42 al azar.</a:t>
+              <a:t>Un plan de RESPUESTA A INCIDENTES DE SEGURIDAD no puede asumir eso. Un atacante colapsa la red con 4 bajas dirigidas en vez de 43 al azar.</a:t>
             </a:r>
             <a:endParaRPr lang="en-US" sz="1200" dirty="0"/>
           </a:p>
@@ -23080,7 +23080,7 @@
                           <a:ea typeface="Calibri" pitchFamily="34" charset="-122"/>
                           <a:cs typeface="Calibri" pitchFamily="34" charset="-120"/>
                         </a:rPr>
-                        <a:t>0,959</a:t>
+                        <a:t>0,901</a:t>
                       </a:r>
                       <a:endParaRPr lang="en-US" sz="1100" dirty="0">
                         <a:latin typeface="Calibri" charset="0"/>
@@ -23145,7 +23145,7 @@
                           <a:ea typeface="Calibri" pitchFamily="34" charset="-122"/>
                           <a:cs typeface="Calibri" pitchFamily="34" charset="-120"/>
                         </a:rPr>
-                        <a:t>0,785</a:t>
+                        <a:t>0,782</a:t>
                       </a:r>
                       <a:endParaRPr lang="en-US" sz="1100" dirty="0">
                         <a:latin typeface="Calibri" charset="0"/>
@@ -23210,7 +23210,7 @@
                           <a:ea typeface="Calibri" pitchFamily="34" charset="-122"/>
                           <a:cs typeface="Calibri" pitchFamily="34" charset="-120"/>
                         </a:rPr>
-                        <a:t>0,598</a:t>
+                        <a:t>0,644</a:t>
                       </a:r>
                       <a:endParaRPr lang="en-US" sz="1100" dirty="0">
                         <a:latin typeface="Calibri" charset="0"/>
@@ -23275,7 +23275,7 @@
                           <a:ea typeface="Calibri" pitchFamily="34" charset="-122"/>
                           <a:cs typeface="Calibri" pitchFamily="34" charset="-120"/>
                         </a:rPr>
-                        <a:t>0,388</a:t>
+                        <a:t>0,409</a:t>
                       </a:r>
                       <a:endParaRPr lang="en-US" sz="1100" dirty="0">
                         <a:latin typeface="Calibri" charset="0"/>
@@ -23407,7 +23407,7 @@
                           <a:ea typeface="Calibri" pitchFamily="34" charset="-122"/>
                           <a:cs typeface="Calibri" pitchFamily="34" charset="-120"/>
                         </a:rPr>
-                        <a:t>0,611</a:t>
+                        <a:t>0,580</a:t>
                       </a:r>
                       <a:endParaRPr lang="en-US" sz="1100" dirty="0">
                         <a:latin typeface="Calibri" charset="0"/>
@@ -23472,7 +23472,7 @@
                           <a:ea typeface="Calibri" pitchFamily="34" charset="-122"/>
                           <a:cs typeface="Calibri" pitchFamily="34" charset="-120"/>
                         </a:rPr>
-                        <a:t>0,148</a:t>
+                        <a:t>0,143</a:t>
                       </a:r>
                       <a:endParaRPr lang="en-US" sz="1100" dirty="0">
                         <a:latin typeface="Calibri" charset="0"/>
@@ -23537,7 +23537,7 @@
                           <a:ea typeface="Calibri" pitchFamily="34" charset="-122"/>
                           <a:cs typeface="Calibri" pitchFamily="34" charset="-120"/>
                         </a:rPr>
-                        <a:t>0,057</a:t>
+                        <a:t>0,051</a:t>
                       </a:r>
                       <a:endParaRPr lang="en-US" sz="1100" dirty="0">
                         <a:latin typeface="Calibri" charset="0"/>
@@ -37072,7 +37072,7 @@
                 <a:ea typeface="Calibri" pitchFamily="34" charset="-122"/>
                 <a:cs typeface="Calibri" pitchFamily="34" charset="-120"/>
               </a:rPr>
-              <a:t>f_c pasa de 0,237 (azar) a 0,023 (ataque). La eficiencia se degrada aún antes que la conectividad.</a:t>
+              <a:t>f_c pasa de 0,243 (azar) a 0,023 (ataque). La eficiencia se degrada aún antes que la conectividad.</a:t>
             </a:r>
             <a:endParaRPr lang="en-US" sz="1200" dirty="0"/>
           </a:p>

--- a/diapositivas/Presentacion_Redes_Complejas_RedUCuenca.pptx
+++ b/diapositivas/Presentacion_Redes_Complejas_RedUCuenca.pptx
@@ -1884,7 +1884,7 @@
           <a:p/>
           <a:p>
             <a:r>
-              <a:t>Pero probé un segundo criterio, deliberadamente distinto: fracción de CAPACIDAD, en Mbps, afectada. Y ahí la respuesta cambia: 8 de los 15 candidatos superan el 20 % de daño de capacidad, y en dos de ellos —nodos core y WAN— ese daño no baja del 20 % ni con el margen más generoso probado. La razón es mecánica: los candidatos a disparador son, por construcción, los nodos que concentran los enlaces troncales de 10 Gbps. Pocos nodos caen, pero si son del núcleo, se llevan buena parte del ancho de banda con pocas fichas. No contradice la conclusión original, la matiza: hace falta redundancia topológica, priorizada en el núcleo, no solo margen de capacidad genérico en toda la red.</a:t>
+              <a:t>Pero probé un segundo criterio, deliberadamente distinto: fracción de CAPACIDAD, en Mbps, afectada. Y ahí la respuesta cambia: 9 de los 15 candidatos superan el 20 % de daño de capacidad, y en dos de ellos —nodos core y WAN— ese daño no baja del 20 % ni con el margen más generoso probado. La razón es mecánica: los candidatos a disparador son, por construcción, los nodos que concentran los enlaces troncales de 10 Gbps. Pocos nodos caen, pero si son del núcleo, se llevan buena parte del ancho de banda con pocas fichas. No contradice la conclusión original, la matiza: hace falta redundancia topológica, priorizada en el núcleo, no solo margen de capacidad genérico en toda la red.</a:t>
             </a:r>
           </a:p>
           <a:p/>
@@ -10707,7 +10707,7 @@
                 <a:ea typeface="Calibri" pitchFamily="34" charset="-122"/>
                 <a:cs typeface="Calibri" pitchFamily="34" charset="-120"/>
               </a:rPr>
-              <a:t>Modelo de Motter-Lai (carga=intermediación, Cᵢ=(1+τ)Lᵢ, 13 valores de τ): con el criterio de NODOS, ningún nodo desencadena una cascada &gt;8,5 % de la red, ni con τ=0 — no hay τ_c positivo. Con un criterio ALTERNATIVO —fracción de CAPACIDAD (Mbps) afectada—, 8 de 15 candidatos superan 20 %, y en dos (core/WAN) el daño no baja de ese umbral ni con τ=1,0: pocos nodos caen, pero si son del núcleo, se llevan mucha capacidad.</a:t>
+              <a:t>Modelo de Motter-Lai (carga=intermediación, Cᵢ=(1+τ)Lᵢ, 13 valores de τ): con el criterio de NODOS, ningún nodo desencadena una cascada &gt;8,5 % de la red, ni con τ=0 — no hay τ_c positivo. Con un criterio ALTERNATIVO —fracción de CAPACIDAD (Mbps) afectada—, 9 de 15 candidatos superan 20 %, y en dos (core/WAN) el daño no baja de ese umbral ni con τ=1,0: pocos nodos caen, pero si son del núcleo, se llevan mucha capacidad.</a:t>
             </a:r>
             <a:endParaRPr lang="en-US" sz="1200" dirty="0"/>
           </a:p>
